--- a/public/fun/pack/pptx/birthdaypro/돌잔치프리미엄_43_사진중심_크림슨골드.pptx
+++ b/public/fun/pack/pptx/birthdaypro/돌잔치프리미엄_43_사진중심_크림슨골드.pptx
@@ -112,12 +112,12 @@
   <p:extLst>
     <p:ext uri="{521415D9-36F7-43E2-AB2F-B90AF26B5E84}">
       <p14:sectionLst xmlns:p14="http://schemas.microsoft.com/office/powerpoint/2010/main">
-        <p14:section name="시작" id="{48394DF8-6D8C-4624-BA41-ABE4F6746D2B}">
+        <p14:section name="시작" id="{2738537C-D527-4206-9C2D-36EC1676B515}">
           <p14:sldIdLst>
             <p14:sldId id="256"/>
           </p14:sldIdLst>
         </p14:section>
-        <p14:section name="본문" id="{3BB1969E-6693-41DF-86E0-19310961D7F1}">
+        <p14:section name="본문" id="{0CBA9116-53BC-4102-8352-F8E8C89880FD}">
           <p14:sldIdLst>
             <p14:sldId id="257"/>
             <p14:sldId id="258"/>
@@ -125,7 +125,7 @@
             <p14:sldId id="260"/>
           </p14:sldIdLst>
         </p14:section>
-        <p14:section name="마무리" id="{6349DE68-2A34-454C-AD71-812EF0B24E77}">
+        <p14:section name="마무리" id="{00F13E9B-58DF-494E-AF0E-587F329F6EA0}">
           <p14:sldIdLst>
             <p14:sldId id="261"/>
           </p14:sldIdLst>
@@ -1416,7 +1416,7 @@
             </a:lvl1pPr>
           </a:lstStyle>
           <a:p>
-            <a:fld id="{B3DFAD90-320A-412F-8BE5-ACAE67E4CBC9}" type="slidenum">
+            <a:fld id="{0225C6AD-2F78-462A-9759-DBD8DB8ECBA5}" type="slidenum">
               <a:rPr lang="en-US"/>
               <a:t>‹#›</a:t>
             </a:fld>
@@ -2120,7 +2120,7 @@
             </a:lvl1pPr>
           </a:lstStyle>
           <a:p>
-            <a:fld id="{BFFD9AA5-30DD-43E3-8442-03ECA691B6C1}" type="slidenum">
+            <a:fld id="{36BACA38-0431-459A-984B-3DD5BB86FFA6}" type="slidenum">
               <a:rPr lang="en-US"/>
               <a:t>‹#›</a:t>
             </a:fld>
@@ -2869,7 +2869,7 @@
             </a:lvl1pPr>
           </a:lstStyle>
           <a:p>
-            <a:fld id="{AAA681B1-FB64-4F66-A2F6-BC1EF8CE747B}" type="slidenum">
+            <a:fld id="{77C2F983-13B0-4AAD-989A-1DA0F6205D91}" type="slidenum">
               <a:rPr lang="en-US"/>
               <a:t>‹#›</a:t>
             </a:fld>
@@ -3732,7 +3732,7 @@
           <a:p>
             <a:r>
               <a:rPr lang="ko-KR"/>
-              <a:t>눈 오던 날 찍은 사진이 마음에 듭니다</a:t>
+              <a:t>마음에 쏙 드는 사진을 골랐습니다</a:t>
             </a:r>
           </a:p>
         </p:txBody>
@@ -3754,7 +3754,7 @@
           <a:p>
             <a:r>
               <a:rPr lang="ko-KR"/>
-              <a:t>아기 이름 · 0000. 00. 00</a:t>
+              <a:t>아기 이름 · 날짜 입력</a:t>
             </a:r>
           </a:p>
           <a:p>
@@ -3937,7 +3937,7 @@
           <a:bodyPr/>
           <a:lstStyle/>
           <a:p>
-            <a:fld id="{6F87BFC7-0082-493A-AD4D-EF5327732959}" type="slidenum">
+            <a:fld id="{E3566887-BC3E-47F3-A260-F10F489B46A3}" type="slidenum">
               <a:rPr lang="en-US"/>
               <a:t>‹#›</a:t>
             </a:fld>
@@ -4699,7 +4699,7 @@
           <a:bodyPr/>
           <a:lstStyle/>
           <a:p>
-            <a:fld id="{5AE04184-F843-4243-AF6A-51982ADAF92D}" type="slidenum">
+            <a:fld id="{059453BB-B321-4848-B7B5-05E85EE17745}" type="slidenum">
               <a:rPr lang="en-US"/>
               <a:t>‹#›</a:t>
             </a:fld>
@@ -4809,7 +4809,7 @@
           <a:bodyPr/>
           <a:lstStyle/>
           <a:p>
-            <a:fld id="{C8B413A8-402C-47F8-89A1-22598D8EF883}" type="slidenum">
+            <a:fld id="{65A77908-7629-459F-B626-C573713C6BFA}" type="slidenum">
               <a:rPr lang="en-US"/>
               <a:t>‹#›</a:t>
             </a:fld>
@@ -6266,7 +6266,7 @@
           <a:bodyPr/>
           <a:lstStyle/>
           <a:p>
-            <a:fld id="{569FD1BA-0D80-4006-A03C-93CD5EF33391}" type="slidenum">
+            <a:fld id="{7A725490-B766-4100-8D7E-90F4891F26FE}" type="slidenum">
               <a:rPr lang="en-US"/>
               <a:t>‹#›</a:t>
             </a:fld>
